--- a/presentations/15-teaching-construction-kit/15-teaching-construction-kit-lecture.pptx
+++ b/presentations/15-teaching-construction-kit/15-teaching-construction-kit-lecture.pptx
@@ -139,7 +139,7 @@
   <p:extLst>
     <p:ext uri="{521415D9-36F7-43E2-AB2F-B90AF26B5E84}">
       <p14:sectionLst xmlns:p14="http://schemas.microsoft.com/office/powerpoint/2010/main">
-        <p14:section name="Opening" id="{2a42eb90-b80c-c842-7d44-aa77d2c1ab02}">
+        <p14:section name="Opening" id="{2dd189a4-2c93-87c8-a110-23970c2a58ed}">
           <p14:sldIdLst>
             <p14:sldId id="256"/>
             <p14:sldId id="257"/>
@@ -154,7 +154,7 @@
             <p14:sldId id="266"/>
           </p14:sldIdLst>
         </p14:section>
-        <p14:section name="Why blocks, why games, why seven" id="{a57057e2-9255-bf68-75eb-867fce19a22f}">
+        <p14:section name="Why blocks, why games, why seven" id="{abe2af4a-5d26-9fcb-882f-ea50101993e2}">
           <p14:sldIdLst>
             <p14:sldId id="267"/>
             <p14:sldId id="268"/>
@@ -163,7 +163,7 @@
             <p14:sldId id="271"/>
           </p14:sldIdLst>
         </p14:section>
-        <p14:section name="Planning" id="{8847324b-216b-efef-828f-9f5490c45fc4}">
+        <p14:section name="Planning" id="{63b326d2-07e4-8588-05ec-9c0f37860338}">
           <p14:sldIdLst>
             <p14:sldId id="272"/>
             <p14:sldId id="273"/>
@@ -171,7 +171,7 @@
             <p14:sldId id="275"/>
           </p14:sldIdLst>
         </p14:section>
-        <p14:section name="Teaching moves" id="{745c6d37-56b9-fbbe-fa09-e45e01510b8d}">
+        <p14:section name="Teaching moves" id="{d868674c-2286-9257-bf4c-886345b8f07b}">
           <p14:sldIdLst>
             <p14:sldId id="276"/>
             <p14:sldId id="277"/>
@@ -179,14 +179,14 @@
             <p14:sldId id="279"/>
           </p14:sldIdLst>
         </p14:section>
-        <p14:section name="Assessment" id="{055a5724-0f04-1c41-d61a-a73177eaa152}">
+        <p14:section name="Assessment" id="{cd94df66-a97f-a3c3-8fd8-cfc63074e0b3}">
           <p14:sldIdLst>
             <p14:sldId id="280"/>
             <p14:sldId id="281"/>
             <p14:sldId id="282"/>
           </p14:sldIdLst>
         </p14:section>
-        <p14:section name="Safety and publishing" id="{b8ca5eaa-4366-7e1f-52cf-6192691f81d1}">
+        <p14:section name="Safety and publishing" id="{504413f0-c988-60d7-4711-08e59712bd1e}">
           <p14:sldIdLst>
             <p14:sldId id="283"/>
             <p14:sldId id="284"/>
@@ -195,7 +195,7 @@
             <p14:sldId id="287"/>
           </p14:sldIdLst>
         </p14:section>
-        <p14:section name="Closing" id="{8ff1a81c-06a7-535e-1739-6eb54d9b5a46}">
+        <p14:section name="Closing" id="{ea282df5-9c47-b763-2311-2f3b7fd793f3}">
           <p14:sldIdLst>
             <p14:sldId id="288"/>
           </p14:sldIdLst>
@@ -24511,7 +24511,7 @@
               <a:buNone/>
             </a:pPr>
             <a:r>
-              <a:rPr lang="en-US" sz="1200" dirty="0">
+              <a:rPr lang="en-US" sz="1350" dirty="0">
                 <a:solidFill>
                   <a:srgbClr val="E6EDF2"/>
                 </a:solidFill>
@@ -24521,14 +24521,14 @@
               </a:rPr>
               <a:t>block:  if button LEFT pressed -&gt; change paddle_x by -4</a:t>
             </a:r>
-            <a:endParaRPr lang="en-US" sz="1200" dirty="0"/>
+            <a:endParaRPr lang="en-US" sz="1350" dirty="0"/>
           </a:p>
           <a:p>
             <a:pPr indent="0" marL="0">
               <a:buNone/>
             </a:pPr>
             <a:r>
-              <a:rPr lang="en-US" sz="1200" dirty="0">
+              <a:rPr lang="en-US" sz="1350" dirty="0">
                 <a:solidFill>
                   <a:srgbClr val="E6EDF2"/>
                 </a:solidFill>
@@ -24538,14 +24538,14 @@
               </a:rPr>
               <a:t> </a:t>
             </a:r>
-            <a:endParaRPr lang="en-US" sz="1200" dirty="0"/>
+            <a:endParaRPr lang="en-US" sz="1350" dirty="0"/>
           </a:p>
           <a:p>
             <a:pPr indent="0" marL="0">
               <a:buNone/>
             </a:pPr>
             <a:r>
-              <a:rPr lang="en-US" sz="1200" dirty="0">
+              <a:rPr lang="en-US" sz="1350" dirty="0">
                 <a:solidFill>
                   <a:srgbClr val="E6EDF2"/>
                 </a:solidFill>
@@ -24555,14 +24555,14 @@
               </a:rPr>
               <a:t>IR:     {"op": "if_button", "button": "LEFT",</a:t>
             </a:r>
-            <a:endParaRPr lang="en-US" sz="1200" dirty="0"/>
+            <a:endParaRPr lang="en-US" sz="1350" dirty="0"/>
           </a:p>
           <a:p>
             <a:pPr indent="0" marL="0">
               <a:buNone/>
             </a:pPr>
             <a:r>
-              <a:rPr lang="en-US" sz="1200" dirty="0">
+              <a:rPr lang="en-US" sz="1350" dirty="0">
                 <a:solidFill>
                   <a:srgbClr val="E6EDF2"/>
                 </a:solidFill>
@@ -24570,16 +24570,33 @@
                 <a:ea typeface="Courier New" pitchFamily="34" charset="-122"/>
                 <a:cs typeface="Courier New" pitchFamily="34" charset="-120"/>
               </a:rPr>
-              <a:t>         "then": [{"op": "change", "var": "paddle_x", "delta": "-4"}]}</a:t>
-            </a:r>
-            <a:endParaRPr lang="en-US" sz="1200" dirty="0"/>
+              <a:t>         "then": [{"op": "change", "var": "paddle_x", "delta":</a:t>
+            </a:r>
+            <a:endParaRPr lang="en-US" sz="1350" dirty="0"/>
           </a:p>
           <a:p>
             <a:pPr indent="0" marL="0">
               <a:buNone/>
             </a:pPr>
             <a:r>
-              <a:rPr lang="en-US" sz="1200" dirty="0">
+              <a:rPr lang="en-US" sz="1350" dirty="0">
+                <a:solidFill>
+                  <a:srgbClr val="E6EDF2"/>
+                </a:solidFill>
+                <a:latin typeface="Courier New" pitchFamily="34" charset="0"/>
+                <a:ea typeface="Courier New" pitchFamily="34" charset="-122"/>
+                <a:cs typeface="Courier New" pitchFamily="34" charset="-120"/>
+              </a:rPr>
+              <a:t>             "-4"}]}</a:t>
+            </a:r>
+            <a:endParaRPr lang="en-US" sz="1350" dirty="0"/>
+          </a:p>
+          <a:p>
+            <a:pPr indent="0" marL="0">
+              <a:buNone/>
+            </a:pPr>
+            <a:r>
+              <a:rPr lang="en-US" sz="1350" dirty="0">
                 <a:solidFill>
                   <a:srgbClr val="E6EDF2"/>
                 </a:solidFill>
@@ -24589,14 +24606,14 @@
               </a:rPr>
               <a:t> </a:t>
             </a:r>
-            <a:endParaRPr lang="en-US" sz="1200" dirty="0"/>
+            <a:endParaRPr lang="en-US" sz="1350" dirty="0"/>
           </a:p>
           <a:p>
             <a:pPr indent="0" marL="0">
               <a:buNone/>
             </a:pPr>
             <a:r>
-              <a:rPr lang="en-US" sz="1200" dirty="0">
+              <a:rPr lang="en-US" sz="1350" dirty="0">
                 <a:solidFill>
                   <a:srgbClr val="E6EDF2"/>
                 </a:solidFill>
@@ -24606,14 +24623,14 @@
               </a:rPr>
               <a:t>C:      if (input &amp; PRG32_BTN_LEFT) {</a:t>
             </a:r>
-            <a:endParaRPr lang="en-US" sz="1200" dirty="0"/>
+            <a:endParaRPr lang="en-US" sz="1350" dirty="0"/>
           </a:p>
           <a:p>
             <a:pPr indent="0" marL="0">
               <a:buNone/>
             </a:pPr>
             <a:r>
-              <a:rPr lang="en-US" sz="1200" dirty="0">
+              <a:rPr lang="en-US" sz="1350" dirty="0">
                 <a:solidFill>
                   <a:srgbClr val="E6EDF2"/>
                 </a:solidFill>
@@ -24623,14 +24640,14 @@
               </a:rPr>
               <a:t>            paddle_x += -4;</a:t>
             </a:r>
-            <a:endParaRPr lang="en-US" sz="1200" dirty="0"/>
+            <a:endParaRPr lang="en-US" sz="1350" dirty="0"/>
           </a:p>
           <a:p>
             <a:pPr indent="0" marL="0">
               <a:buNone/>
             </a:pPr>
             <a:r>
-              <a:rPr lang="en-US" sz="1200" dirty="0">
+              <a:rPr lang="en-US" sz="1350" dirty="0">
                 <a:solidFill>
                   <a:srgbClr val="E6EDF2"/>
                 </a:solidFill>
@@ -24640,14 +24657,14 @@
               </a:rPr>
               <a:t>        }</a:t>
             </a:r>
-            <a:endParaRPr lang="en-US" sz="1200" dirty="0"/>
+            <a:endParaRPr lang="en-US" sz="1350" dirty="0"/>
           </a:p>
           <a:p>
             <a:pPr indent="0" marL="0">
               <a:buNone/>
             </a:pPr>
             <a:r>
-              <a:rPr lang="en-US" sz="1200" dirty="0">
+              <a:rPr lang="en-US" sz="1350" dirty="0">
                 <a:solidFill>
                   <a:srgbClr val="E6EDF2"/>
                 </a:solidFill>
@@ -24657,14 +24674,14 @@
               </a:rPr>
               <a:t> </a:t>
             </a:r>
-            <a:endParaRPr lang="en-US" sz="1200" dirty="0"/>
+            <a:endParaRPr lang="en-US" sz="1350" dirty="0"/>
           </a:p>
           <a:p>
             <a:pPr indent="0" marL="0">
               <a:buNone/>
             </a:pPr>
             <a:r>
-              <a:rPr lang="en-US" sz="1200" dirty="0">
+              <a:rPr lang="en-US" sz="1350" dirty="0">
                 <a:solidFill>
                   <a:srgbClr val="E6EDF2"/>
                 </a:solidFill>
@@ -24674,7 +24691,7 @@
               </a:rPr>
               <a:t>JS:     if (keys.LEFT) { state.paddle_x += -4; }</a:t>
             </a:r>
-            <a:endParaRPr lang="en-US" sz="1200" dirty="0"/>
+            <a:endParaRPr lang="en-US" sz="1350" dirty="0"/>
           </a:p>
         </p:txBody>
       </p:sp>
